--- a/docs/handover/Nexus_인수인계_보고_2026_09.pptx
+++ b/docs/handover/Nexus_인수인계_보고_2026_09.pptx
@@ -8803,7 +8803,7 @@
                           <a:ea typeface="청정원명조 R"/>
                           <a:cs typeface="청정원명조 R"/>
                         </a:rPr>
-                        <a:t>온톨로지에서 키워드·인과 경로를 파생, 창 14일, 지정학 기사 포함, 변인마다 '연결 근거' 한 줄(미등재는 '상관 기반 참고')</a:t>
+                        <a:t>용어·인과 사전에서 키워드·등재 경로를 파생, 창 14일, 지정학 기사 포함, 변인마다 '연결 근거' 한 줄(미등재는 '상관 기반 참고')</a:t>
                       </a:r>
                     </a:p>
                   </a:txBody>
@@ -8892,7 +8892,7 @@
                           <a:ea typeface="청정원명조 R"/>
                           <a:cs typeface="청정원명조 R"/>
                         </a:rPr>
-                        <a:t>사례별 관련 변수 등재 → 날짜 겹침 AND 인과 관련일 때만 배지 · 변수→대두유 연결 설명 추가</a:t>
+                        <a:t>사례별 관련 변수 등재 → 날짜 겹침 AND 관련 변수일 때만 배지(관련성 필터) · 변수→대두유 연결 설명 추가</a:t>
                       </a:r>
                     </a:p>
                   </a:txBody>
@@ -21835,7 +21835,7 @@
                 <a:ea typeface="청정원고딕 R"/>
                 <a:cs typeface="청정원고딕 R"/>
               </a:rPr>
-              <a:t>과거 유사 시기 — 확률이 아니라 "과거엔 이랬다". 표본 8회 미만이면 비워 둠. 사례 배지는 변수와 사례가 인과적으로 연결된 경우에만 붙음</a:t>
+              <a:t>과거 유사 시기 — 확률이 아니라 "과거엔 이랬다". 표본 8회 미만이면 비워 둠. 사례 배지는 변수가 사례의 관련 변수로 등재된 경우에만 붙음(관련성 필터)</a:t>
             </a:r>
           </a:p>
         </p:txBody>
@@ -21917,7 +21917,7 @@
                 <a:ea typeface="청정원고딕 R"/>
                 <a:cs typeface="청정원고딕 R"/>
               </a:rPr>
-              <a:t>핵심 변인마다 '연결 근거' 한 줄 — 어떤 검증된 원인→결과 경로로 대두유에 닿는지, 최근 14일 기사 중 연결된 기사(한국어 헤드라인)</a:t>
+              <a:t>핵심 변인마다 '연결 근거' 한 줄 — 용어·인과 사전에 등재된 경로(사전의 검증 상태 표기)와 최근 14일 기사 중 키워드로 연결된 기사(한국어 헤드라인)</a:t>
             </a:r>
           </a:p>
         </p:txBody>
@@ -22682,7 +22682,7 @@
         <p:spPr>
           <a:xfrm>
             <a:off x="5140756" y="3221736"/>
-            <a:ext cx="2108606" cy="928115"/>
+            <a:ext cx="2108606" cy="1072896"/>
           </a:xfrm>
           <a:prstGeom prst="rect">
             <a:avLst/>
@@ -22809,7 +22809,7 @@
         <p:spPr>
           <a:xfrm>
             <a:off x="5232196" y="3569208"/>
-            <a:ext cx="1925726" cy="489203"/>
+            <a:ext cx="1925726" cy="633984"/>
           </a:xfrm>
           <a:prstGeom prst="rect">
             <a:avLst/>
@@ -22836,7 +22836,7 @@
                 <a:ea typeface="청정원명조 R"/>
                 <a:cs typeface="청정원명조 R"/>
               </a:rPr>
-              <a:t>같은 상태였던 과거 시기의 1주/1개월/3개월 실제 변화 + 변수→대두유 연결 설명</a:t>
+              <a:t>같은 상태였던 과거 시기의 1주/1개월/3개월 실제 변화 + 변수→대두유 연결 설명(사전 등재 경로)</a:t>
             </a:r>
           </a:p>
         </p:txBody>
@@ -22850,7 +22850,7 @@
         <p:spPr>
           <a:xfrm>
             <a:off x="7359091" y="3221736"/>
-            <a:ext cx="2108606" cy="928115"/>
+            <a:ext cx="2108606" cy="1072896"/>
           </a:xfrm>
           <a:prstGeom prst="rect">
             <a:avLst/>
@@ -22977,7 +22977,7 @@
         <p:spPr>
           <a:xfrm>
             <a:off x="7450531" y="3569208"/>
-            <a:ext cx="1925726" cy="489203"/>
+            <a:ext cx="1925726" cy="633984"/>
           </a:xfrm>
           <a:prstGeom prst="rect">
             <a:avLst/>
@@ -23018,7 +23018,7 @@
         <p:spPr>
           <a:xfrm>
             <a:off x="9577425" y="3221736"/>
-            <a:ext cx="2108606" cy="928115"/>
+            <a:ext cx="2108606" cy="1072896"/>
           </a:xfrm>
           <a:prstGeom prst="rect">
             <a:avLst/>
@@ -23145,7 +23145,7 @@
         <p:spPr>
           <a:xfrm>
             <a:off x="9668865" y="3569208"/>
-            <a:ext cx="1925726" cy="489203"/>
+            <a:ext cx="1925726" cy="633984"/>
           </a:xfrm>
           <a:prstGeom prst="rect">
             <a:avLst/>
@@ -23185,7 +23185,7 @@
         </p:nvSpPr>
         <p:spPr>
           <a:xfrm>
-            <a:off x="5140756" y="4186428"/>
+            <a:off x="5140756" y="4331208"/>
             <a:ext cx="2108606" cy="928115"/>
           </a:xfrm>
           <a:prstGeom prst="rect">
@@ -23229,7 +23229,7 @@
         </p:nvSpPr>
         <p:spPr>
           <a:xfrm>
-            <a:off x="5140756" y="4186428"/>
+            <a:off x="5140756" y="4331208"/>
             <a:ext cx="2108606" cy="45720"/>
           </a:xfrm>
           <a:prstGeom prst="rect">
@@ -23271,7 +23271,7 @@
         </p:nvSpPr>
         <p:spPr>
           <a:xfrm>
-            <a:off x="5232196" y="4259580"/>
+            <a:off x="5232196" y="4404360"/>
             <a:ext cx="1925726" cy="274320"/>
           </a:xfrm>
           <a:prstGeom prst="rect">
@@ -23312,7 +23312,7 @@
         </p:nvSpPr>
         <p:spPr>
           <a:xfrm>
-            <a:off x="5232196" y="4533900"/>
+            <a:off x="5232196" y="4678680"/>
             <a:ext cx="1925726" cy="489203"/>
           </a:xfrm>
           <a:prstGeom prst="rect">
@@ -23353,7 +23353,7 @@
         </p:nvSpPr>
         <p:spPr>
           <a:xfrm>
-            <a:off x="7359091" y="4186428"/>
+            <a:off x="7359091" y="4331208"/>
             <a:ext cx="2108606" cy="928115"/>
           </a:xfrm>
           <a:prstGeom prst="rect">
@@ -23397,7 +23397,7 @@
         </p:nvSpPr>
         <p:spPr>
           <a:xfrm>
-            <a:off x="7359091" y="4186428"/>
+            <a:off x="7359091" y="4331208"/>
             <a:ext cx="2108606" cy="45720"/>
           </a:xfrm>
           <a:prstGeom prst="rect">
@@ -23439,7 +23439,7 @@
         </p:nvSpPr>
         <p:spPr>
           <a:xfrm>
-            <a:off x="7450531" y="4259580"/>
+            <a:off x="7450531" y="4404360"/>
             <a:ext cx="1925726" cy="274320"/>
           </a:xfrm>
           <a:prstGeom prst="rect">
@@ -23480,7 +23480,7 @@
         </p:nvSpPr>
         <p:spPr>
           <a:xfrm>
-            <a:off x="7450531" y="4533900"/>
+            <a:off x="7450531" y="4678680"/>
             <a:ext cx="1925726" cy="489203"/>
           </a:xfrm>
           <a:prstGeom prst="rect">
@@ -23521,7 +23521,7 @@
         </p:nvSpPr>
         <p:spPr>
           <a:xfrm>
-            <a:off x="9577425" y="4186428"/>
+            <a:off x="9577425" y="4331208"/>
             <a:ext cx="2108606" cy="928115"/>
           </a:xfrm>
           <a:prstGeom prst="rect">
@@ -23565,7 +23565,7 @@
         </p:nvSpPr>
         <p:spPr>
           <a:xfrm>
-            <a:off x="9577425" y="4186428"/>
+            <a:off x="9577425" y="4331208"/>
             <a:ext cx="2108606" cy="45720"/>
           </a:xfrm>
           <a:prstGeom prst="rect">
@@ -23607,7 +23607,7 @@
         </p:nvSpPr>
         <p:spPr>
           <a:xfrm>
-            <a:off x="9668865" y="4259580"/>
+            <a:off x="9668865" y="4404360"/>
             <a:ext cx="1925726" cy="274320"/>
           </a:xfrm>
           <a:prstGeom prst="rect">
@@ -23648,7 +23648,7 @@
         </p:nvSpPr>
         <p:spPr>
           <a:xfrm>
-            <a:off x="9668865" y="4533900"/>
+            <a:off x="9668865" y="4678680"/>
             <a:ext cx="1925726" cy="489203"/>
           </a:xfrm>
           <a:prstGeom prst="rect">
@@ -23689,7 +23689,7 @@
         </p:nvSpPr>
         <p:spPr>
           <a:xfrm>
-            <a:off x="5140756" y="5532120"/>
+            <a:off x="5140756" y="5676900"/>
             <a:ext cx="6545275" cy="277368"/>
           </a:xfrm>
           <a:prstGeom prst="rect">
@@ -26813,7 +26813,7 @@
         <p:spPr>
           <a:xfrm>
             <a:off x="502920" y="2895904"/>
-            <a:ext cx="201168" cy="355701"/>
+            <a:ext cx="201168" cy="506120"/>
           </a:xfrm>
           <a:prstGeom prst="rect">
             <a:avLst/>
@@ -26854,7 +26854,7 @@
         <p:spPr>
           <a:xfrm>
             <a:off x="685800" y="2895904"/>
-            <a:ext cx="6344107" cy="355701"/>
+            <a:ext cx="6344107" cy="506120"/>
           </a:xfrm>
           <a:prstGeom prst="rect">
             <a:avLst/>
@@ -26881,7 +26881,7 @@
                 <a:ea typeface="청정원고딕 R"/>
                 <a:cs typeface="청정원고딕 R"/>
               </a:rPr>
-              <a:t>기대효과 ③ 정량+비정형 하이브리드 — 상위 변인마다 검증된 인과 경로와 최근 14일 기사(외교 사건·발언 포함)를 함께 붙여 '왜 이 변인인가'를 설명(9/27 재설계)</a:t>
+              <a:t>기대효과 ③ 정량+비정형 하이브리드 — 상위 변인마다 사전 등재 경로(검증 상태 표기)와 최근 14일 기사(외교 사건·발언 포함)를 함께 붙여 '왜 이 변인인가'를 설명(9/27 재설계 — 당일 인과 식별은 아님)</a:t>
             </a:r>
           </a:p>
         </p:txBody>
@@ -26894,7 +26894,7 @@
         </p:nvSpPr>
         <p:spPr>
           <a:xfrm>
-            <a:off x="502920" y="3251606"/>
+            <a:off x="502920" y="3402025"/>
             <a:ext cx="201168" cy="205282"/>
           </a:xfrm>
           <a:prstGeom prst="rect">
@@ -26935,7 +26935,7 @@
         </p:nvSpPr>
         <p:spPr>
           <a:xfrm>
-            <a:off x="685800" y="3251606"/>
+            <a:off x="685800" y="3402025"/>
             <a:ext cx="6344107" cy="205282"/>
           </a:xfrm>
           <a:prstGeom prst="rect">
@@ -26976,7 +26976,7 @@
         </p:nvSpPr>
         <p:spPr>
           <a:xfrm>
-            <a:off x="502920" y="3456889"/>
+            <a:off x="502920" y="3607308"/>
             <a:ext cx="201168" cy="205282"/>
           </a:xfrm>
           <a:prstGeom prst="rect">
@@ -27017,7 +27017,7 @@
         </p:nvSpPr>
         <p:spPr>
           <a:xfrm>
-            <a:off x="685800" y="3456889"/>
+            <a:off x="685800" y="3607308"/>
             <a:ext cx="6344107" cy="205282"/>
           </a:xfrm>
           <a:prstGeom prst="rect">
